--- a/Lessons/05_experimental_methodology/Slides/experimental_methodology_slides.pptx
+++ b/Lessons/05_experimental_methodology/Slides/experimental_methodology_slides.pptx
@@ -14455,7 +14455,7 @@
             <a:pPr lvl="0"/>
             <a:r>
               <a:rPr/>
-              <a:t>Every AUC — area under the ROC curve, from lesson 4 — rests on seven of them</a:t>
+              <a:t>Every AUC — area under the receiver operating characteristic curve — rests on seven</a:t>
             </a:r>
           </a:p>
         </p:txBody>

--- a/Lessons/05_experimental_methodology/Slides/experimental_methodology_slides.pptx
+++ b/Lessons/05_experimental_methodology/Slides/experimental_methodology_slides.pptx
@@ -583,7 +583,7 @@
             </a:pPr>
             <a:r>
               <a:rPr/>
-              <a:t>The recurring mistake to name, if it appeared: choosing the threshold by sweeping it on the test set. The exercise sheet said that losing marks for it was avoidable by simply declaring it — and today is the lesson that shows why it matters rather than asserting that it does.</a:t>
+              <a:t>The recurring mistake to name, if it appeared: choosing the threshold by sweeping it on the test set. The exercise sheet said that losing marks for it was avoidable by simply declaring it - and today is the lesson that shows why it matters rather than asserting that it does.</a:t>
             </a:r>
           </a:p>
         </p:txBody>
@@ -665,7 +665,7 @@
             </a:pPr>
             <a:r>
               <a:rPr/>
-              <a:t>The idea in a sentence: if one measurement is noisy, take several and average them. The difficulty is that you cannot afford several test sets — every row spent on testing is a row not spent on training.</a:t>
+              <a:t>The idea in a sentence: if one measurement is noisy, take several and average them. The difficulty is that you cannot afford several test sets - every row spent on testing is a row not spent on training.</a:t>
             </a:r>
           </a:p>
           <a:p>
@@ -789,7 +789,7 @@
             </a:pPr>
             <a:r>
               <a:rPr/>
-              <a:t>First: there are k different fitted models in the calculation, and the reported number belongs to none of them. It answers “if I apply this procedure to a dataset of about this size, what should I expect?” — which is the question you actually have.</a:t>
+              <a:t>First: there are k different fitted models in the calculation, and the reported number belongs to none of them. It answers “if I apply this procedure to a dataset of about this size, what should I expect?” - which is the question you actually have.</a:t>
             </a:r>
           </a:p>
           <a:p>
@@ -1023,7 +1023,7 @@
             </a:pPr>
             <a:r>
               <a:rPr/>
-              <a:t>Point at fold 2 of the left column. An AUC computed from a single positive example is not a measurement of anything — and nothing in the code warns you.</a:t>
+              <a:t>Point at fold 2 of the left column. An AUC computed from a single positive example is not a measurement of anything - and nothing in the code warns you.</a:t>
             </a:r>
           </a:p>
           <a:p>
@@ -1147,7 +1147,7 @@
             </a:pPr>
             <a:r>
               <a:rPr/>
-              <a:t>The spread falls from 0.088 to 0.015 — about seven times more stable. And note that both centre in the same place: cross-validation is not more pessimistic, it is less arbitrary.</a:t>
+              <a:t>The spread falls from 0.088 to 0.015 - about seven times more stable. And note that both centre in the same place: cross-validation is not more pessimistic, it is less arbitrary.</a:t>
             </a:r>
           </a:p>
           <a:p>
@@ -1271,7 +1271,7 @@
             </a:pPr>
             <a:r>
               <a:rPr/>
-              <a:t>Larger k means each fold trains on more data, so the estimate is less pessimistic — the bias shrinks. It also means more fits, and the training sets overlap even more heavily, so the fold scores are more strongly correlated and the spread you observe understates the uncertainty by more.</a:t>
+              <a:t>Larger k means each fold trains on more data, so the estimate is less pessimistic - the bias shrinks. It also means more fits, and the training sets overlap even more heavily, so the fold scores are more strongly correlated and the spread you observe understates the uncertainty by more.</a:t>
             </a:r>
           </a:p>
           <a:p>
@@ -1299,7 +1299,7 @@
             </a:pPr>
             <a:r>
               <a:rPr/>
-              <a:t>If you have the compute, repeated k-fold — the whole procedure run with several different shuffles, averaged — buys more than moving from 5 to 10.</a:t>
+              <a:t>If you have the compute, repeated k-fold - the whole procedure run with several different shuffles, averaged - buys more than moving from 5 to 10.</a:t>
             </a:r>
           </a:p>
         </p:txBody>
@@ -1395,7 +1395,7 @@
             </a:pPr>
             <a:r>
               <a:rPr/>
-              <a:t>The concrete case, which they will meet: your table has ten telemetry readings per drive. A random split puts nine of a drive’s readings in training and one in test. The model does not need to learn anything about failure — it learns to recognise that drive, and the test row is nearly a duplicate of a training row.</a:t>
+              <a:t>The concrete case, which they will meet: your table has ten telemetry readings per drive. A random split puts nine of a drive’s readings in training and one in test. The model does not need to learn anything about failure - it learns to recognise that drive, and the test row is nearly a duplicate of a training row.</a:t>
             </a:r>
           </a:p>
           <a:p>
@@ -1533,7 +1533,7 @@
             </a:pPr>
             <a:r>
               <a:rPr/>
-              <a:t>The tell that you needed one of these and did not use it is the same in both cases — a validation score that is excellent and a production score that is not. That gap is the most common cause of a model failing after deployment.</a:t>
+              <a:t>The tell that you needed one of these and did not use it is the same in both cases - a validation score that is excellent and a production score that is not. That gap is the most common cause of a model failing after deployment.</a:t>
             </a:r>
           </a:p>
         </p:txBody>
@@ -1643,7 +1643,7 @@
             </a:pPr>
             <a:r>
               <a:rPr/>
-              <a:t>The cell worth protecting if time runs short is the 200-split model selection — it is the one that changes behaviour rather than just adding knowledge.</a:t>
+              <a:t>The cell worth protecting if time runs short is the 200-split model selection - it is the one that changes behaviour rather than just adding knowledge.</a:t>
             </a:r>
           </a:p>
         </p:txBody>
@@ -1945,21 +1945,21 @@
             </a:pPr>
             <a:r>
               <a:rPr/>
-              <a:t>They may agree with each other and all be wrong — a straight line fitted to a curve gives nearly the same line every time and every one misses the curvature. That is bias: consistently, confidently wrong.</a:t>
-            </a:r>
-          </a:p>
-          <a:p>
-            <a:pPr lvl="0" indent="0" marL="0">
-              <a:buNone/>
-            </a:pPr>
-          </a:p>
-          <a:p>
-            <a:pPr lvl="0" indent="0" marL="0">
-              <a:buNone/>
-            </a:pPr>
-            <a:r>
-              <a:rPr/>
-              <a:t>Or they may disagree wildly — a twelfth-degree polynomial on twenty-five points gives a different wild curve every time. That is variance: unreliable, whatever the average looks like.</a:t>
+              <a:t>They may agree with each other and all be wrong - a straight line fitted to a curve gives nearly the same line every time and every one misses the curvature. That is bias: consistently, confidently wrong.</a:t>
+            </a:r>
+          </a:p>
+          <a:p>
+            <a:pPr lvl="0" indent="0" marL="0">
+              <a:buNone/>
+            </a:pPr>
+          </a:p>
+          <a:p>
+            <a:pPr lvl="0" indent="0" marL="0">
+              <a:buNone/>
+            </a:pPr>
+            <a:r>
+              <a:rPr/>
+              <a:t>Or they may disagree wildly - a twelfth-degree polynomial on twenty-five points gives a different wild curve every time. That is variance: unreliable, whatever the average looks like.</a:t>
             </a:r>
           </a:p>
           <a:p>
@@ -2069,7 +2069,7 @@
             </a:pPr>
             <a:r>
               <a:rPr/>
-              <a:t>Left, degree 1: the lines lie almost on top of each other — stable — and the red average is nowhere near the black truth. That gap is bias.</a:t>
+              <a:t>Left, degree 1: the lines lie almost on top of each other - stable - and the red average is nowhere near the black truth. That gap is bias.</a:t>
             </a:r>
           </a:p>
           <a:p>
@@ -2111,7 +2111,7 @@
             </a:pPr>
             <a:r>
               <a:rPr/>
-              <a:t>Two things to point at in the right panel. The scatter is worst WHERE THE DATA RUNS OUT — beyond about 30 degrees nothing constrains the fit. Extrapolation is where flexible models embarrass themselves.</a:t>
+              <a:t>Two things to point at in the right panel. The scatter is worst WHERE THE DATA RUNS OUT - beyond about 30 degrees nothing constrains the fit. Extrapolation is where flexible models embarrass themselves.</a:t>
             </a:r>
           </a:p>
           <a:p>
@@ -2207,21 +2207,21 @@
             </a:pPr>
             <a:r>
               <a:rPr/>
-              <a:t>State it, do not derive it — handout section 5.2 does that in five lines, and it is worth reading because the derivation is short and the cross terms vanishing is the whole trick.</a:t>
-            </a:r>
-          </a:p>
-          <a:p>
-            <a:pPr lvl="0" indent="0" marL="0">
-              <a:buNone/>
-            </a:pPr>
-          </a:p>
-          <a:p>
-            <a:pPr lvl="0" indent="0" marL="0">
-              <a:buNone/>
-            </a:pPr>
-            <a:r>
-              <a:rPr/>
-              <a:t>The important claim is that this is an IDENTITY, not an approximation or a useful metaphor. Notebook 2 checks it on 300 independently drawn training sets and the two sides agree to three times ten to the minus twelve — floating-point equality.</a:t>
+              <a:t>State it, do not derive it - handout section 5.2 does that in five lines, and it is worth reading because the derivation is short and the cross terms vanishing is the whole trick.</a:t>
+            </a:r>
+          </a:p>
+          <a:p>
+            <a:pPr lvl="0" indent="0" marL="0">
+              <a:buNone/>
+            </a:pPr>
+          </a:p>
+          <a:p>
+            <a:pPr lvl="0" indent="0" marL="0">
+              <a:buNone/>
+            </a:pPr>
+            <a:r>
+              <a:rPr/>
+              <a:t>The important claim is that this is an IDENTITY, not an approximation or a useful metaphor. Notebook 2 checks it on 300 independently drawn training sets and the two sides agree to three times ten to the minus twelve - floating-point equality.</a:t>
             </a:r>
           </a:p>
           <a:p>
@@ -2317,7 +2317,7 @@
             </a:pPr>
             <a:r>
               <a:rPr/>
-              <a:t>Noise is 484 in every row and is left out of the table for width — say so.</a:t>
+              <a:t>Noise is 484 in every row and is left out of the table for width - say so.</a:t>
             </a:r>
           </a:p>
           <a:p>
@@ -2703,7 +2703,7 @@
             </a:pPr>
             <a:r>
               <a:rPr/>
-              <a:t>This explains something they will meet constantly — a paper reports a large model beating a small one on a dataset far bigger than theirs, and it does not reproduce for them. Neither experiment was wrong.</a:t>
+              <a:t>This explains something they will meet constantly - a paper reports a large model beating a small one on a dataset far bigger than theirs, and it does not reproduce for them. Neither experiment was wrong.</a:t>
             </a:r>
           </a:p>
         </p:txBody>
@@ -2813,7 +2813,7 @@
             </a:pPr>
             <a:r>
               <a:rPr/>
-              <a:t>Left, one feature only: the curves MEET, and they meet LOW — 0.715 against 0.718 — and the validation curve is flat from the first point to the last.</a:t>
+              <a:t>Left, one feature only: the curves MEET, and they meet LOW - 0.715 against 0.718 - and the validation curve is flat from the first point to the last.</a:t>
             </a:r>
           </a:p>
           <a:p>
@@ -2937,7 +2937,7 @@
             </a:pPr>
             <a:r>
               <a:rPr/>
-              <a:t>High bias: the model is equally mediocre on data it has seen and data it has not, because it extracted everything available and that was not enough. What helps is a more flexible model, better features, less regularisation. What does NOT help is more data — the curve is already flat, and more rows land on the same plateau.</a:t>
+              <a:t>High bias: the model is equally mediocre on data it has seen and data it has not, because it extracted everything available and that was not enough. What helps is a more flexible model, better features, less regularisation. What does NOT help is more data - the curve is already flat, and more rows land on the same plateau.</a:t>
             </a:r>
           </a:p>
           <a:p>
@@ -2979,7 +2979,7 @@
             </a:pPr>
             <a:r>
               <a:rPr/>
-              <a:t>Name the predictable mistake and defend the instinct: prescribing data for a bias problem is what almost everyone does, and the reasoning is sound — more data almost always helps and never makes a model worse. It just does not help THIS failure, and fifteen lines of code tell you which failure you have.</a:t>
+              <a:t>Name the predictable mistake and defend the instinct: prescribing data for a bias problem is what almost everyone does, and the reasoning is sound - more data almost always helps and never makes a model worse. It just does not help THIS failure, and fifteen lines of code tell you which failure you have.</a:t>
             </a:r>
           </a:p>
         </p:txBody>
@@ -3089,7 +3089,7 @@
             </a:pPr>
             <a:r>
               <a:rPr/>
-              <a:t>If time is short, skip the three-sample-size comparison and assign it as reading — the table is in the handout.</a:t>
+              <a:t>If time is short, skip the three-sample-size comparison and assign it as reading - the table is in the handout.</a:t>
             </a:r>
           </a:p>
         </p:txBody>
@@ -3185,7 +3185,7 @@
             </a:pPr>
             <a:r>
               <a:rPr/>
-              <a:t>They can already build models — lessons 3 and 4 gave them two, scikit-learn gives a hundred more for one line each. Producing a model that appears to work is an afternoon’s work and it is not the job. Knowing whether it does work is considerably harder.</a:t>
+              <a:t>They can already build models - lessons 3 and 4 gave them two, scikit-learn gives a hundred more for one line each. Producing a model that appears to work is an afternoon’s work and it is not the job. Knowing whether it does work is considerably harder.</a:t>
             </a:r>
           </a:p>
           <a:p>
@@ -3639,7 +3639,7 @@
             </a:pPr>
             <a:r>
               <a:rPr/>
-              <a:t>The leak is mostly gone — 0.93 down to 0.66. And it has NOT come back to 0.5. Twenty different fold seeds all agree that a signal-free dataset supports a model better than chance.</a:t>
+              <a:t>The leak is mostly gone - 0.93 down to 0.66. And it has NOT come back to 0.5. Twenty different fold seeds all agree that a signal-free dataset supports a model better than chance.</a:t>
             </a:r>
           </a:p>
           <a:p>
@@ -3749,7 +3749,7 @@
             </a:pPr>
             <a:r>
               <a:rPr/>
-              <a:t>With two thousand columns and eight hundred rows, some columns correlate with the label purely by chance across the whole dataset. That accident is a property of this particular sample. It is present in every subset of it — every training fold and every test fold alike.</a:t>
+              <a:t>With two thousand columns and eight hundred rows, some columns correlate with the label purely by chance across the whole dataset. That accident is a property of this particular sample. It is present in every subset of it - every training fold and every test fold alike.</a:t>
             </a:r>
           </a:p>
           <a:p>
@@ -3887,7 +3887,7 @@
             </a:pPr>
             <a:r>
               <a:rPr/>
-              <a:t>The number a practitioner reports is best_score_, and it is the MAXIMUM of 25 noisy estimates. The maximum of a set of noisy numbers is biased upward even when every one measures the same quantity — and here they nearly do, since the average candidate is 0.73 and the worst is 0.68.</a:t>
+              <a:t>The number a practitioner reports is best_score_, and it is the MAXIMUM of 25 noisy estimates. The maximum of a set of noisy numbers is biased upward even when every one measures the same quantity - and here they nearly do, since the average candidate is 0.73 and the worst is 0.68.</a:t>
             </a:r>
           </a:p>
           <a:p>
@@ -4039,7 +4039,7 @@
             </a:pPr>
             <a:r>
               <a:rPr/>
-              <a:t>One clarification that always comes up, so pre-empt it: nested cross-validation is NOT a way to choose hyperparameters — it produces k possibly different winners. It is a way to estimate what choosing costs. You choose on all the data afterwards, and you report the nested figure.</a:t>
+              <a:t>One clarification that always comes up, so pre-empt it: nested cross-validation is NOT a way to choose hyperparameters - it produces k possibly different winners. It is a way to estimate what choosing costs. You choose on all the data afterwards, and you report the nested figure.</a:t>
             </a:r>
           </a:p>
         </p:txBody>
@@ -4259,7 +4259,7 @@
             </a:pPr>
             <a:r>
               <a:rPr/>
-              <a:t>The honest threshold is WORSE on the test set than the cheating one. It is supposed to be — and this is the slide where that finally makes sense to them.</a:t>
+              <a:t>The honest threshold is WORSE on the test set than the cheating one. It is supposed to be - and this is the slide where that finally makes sense to them.</a:t>
             </a:r>
           </a:p>
           <a:p>
@@ -4287,7 +4287,7 @@
             </a:pPr>
             <a:r>
               <a:rPr/>
-              <a:t>Note the cost: we now train on 56% of the data instead of 75%, because the validation set has to come from somewhere. On a small dataset that hurts — which is the argument for choosing by cross-validation on the training portion and keeping the test set whole.</a:t>
+              <a:t>Note the cost: we now train on 56% of the data instead of 75%, because the validation set has to come from somewhere. On a small dataset that hurts - which is the argument for choosing by cross-validation on the training portion and keeping the test set whole.</a:t>
             </a:r>
           </a:p>
         </p:txBody>
@@ -4383,7 +4383,7 @@
             </a:pPr>
             <a:r>
               <a:rPr/>
-              <a:t>Every choice belongs to the validation set. Which model, which penalty, which features, which threshold, when to stop training, whether to try a different approach entirely — all of it.</a:t>
+              <a:t>Every choice belongs to the validation set. Which model, which penalty, which features, which threshold, when to stop training, whether to try a different approach entirely - all of it.</a:t>
             </a:r>
           </a:p>
           <a:p>
@@ -4493,7 +4493,7 @@
             </a:pPr>
             <a:r>
               <a:rPr/>
-              <a:t>This distinction is the whole first half of the lesson, and it is routinely missed — because “test set accuracy” sounds like a property of the model rather than a measurement with a standard error.</a:t>
+              <a:t>This distinction is the whole first half of the lesson, and it is routinely missed - because “test set accuracy” sounds like a property of the model rather than a measurement with a standard error.</a:t>
             </a:r>
           </a:p>
           <a:p>
@@ -4631,7 +4631,7 @@
             </a:pPr>
             <a:r>
               <a:rPr/>
-              <a:t>Contrast the two ways of writing the same experiment up. “AUC 1.000, random_state=3” — fully reproducible, thoroughly misleading. “AUC 0.951 plus or minus 0.019 over 5-fold cross-validation, seed 0” — reproducible and honest.</a:t>
+              <a:t>Contrast the two ways of writing the same experiment up. “AUC 1.000, random_state=3” - fully reproducible, thoroughly misleading. “AUC 0.951 plus or minus 0.019 over 5-fold cross-validation, seed 0” - reproducible and honest.</a:t>
             </a:r>
           </a:p>
           <a:p>
@@ -4741,7 +4741,7 @@
             </a:pPr>
             <a:r>
               <a:rPr/>
-              <a:t>Worth saying that a result nobody can reproduce in two years was not really reproducible — and that scikit-learn genuinely does change defaults between minor versions, which has invalidated published comparisons.</a:t>
+              <a:t>Worth saying that a result nobody can reproduce in two years was not really reproducible - and that scikit-learn genuinely does change defaults between minor versions, which has invalidated published comparisons.</a:t>
             </a:r>
           </a:p>
           <a:p>
@@ -4851,7 +4851,7 @@
             </a:pPr>
             <a:r>
               <a:rPr/>
-              <a:t>The cell to protect is the first one — let them watch 0.931 appear on empty data before any explanation. Nothing else in the lesson changes behaviour as reliably.</a:t>
+              <a:t>The cell to protect is the first one - let them watch 0.931 appear on empty data before any explanation. Nothing else in the lesson changes behaviour as reliably.</a:t>
             </a:r>
           </a:p>
         </p:txBody>
@@ -4961,7 +4961,7 @@
             </a:pPr>
             <a:r>
               <a:rPr/>
-              <a:t>Turn it around as a reading habit too. When they meet a paper reporting a single figure with no spread, no fold count and no statement about how the hyperparameters were chosen, they now know exactly which questions are unanswered — and roughly how large the correction is likely to be.</a:t>
+              <a:t>Turn it around as a reading habit too. When they meet a paper reporting a single figure with no spread, no fold count and no statement about how the hyperparameters were chosen, they now know exactly which questions are unanswered - and roughly how large the correction is likely to be.</a:t>
             </a:r>
           </a:p>
         </p:txBody>
@@ -5181,7 +5181,7 @@
             </a:pPr>
             <a:r>
               <a:rPr/>
-              <a:t>Warn them that there is more than one problem planted, and that the marks are for the diagnosis rather than for the final figure — which will be much worse than the one they start with, and is supposed to be.</a:t>
+              <a:t>Warn them that there is more than one problem planted, and that the marks are for the diagnosis rather than for the final figure - which will be much worse than the one they start with, and is supposed to be.</a:t>
             </a:r>
           </a:p>
           <a:p>
@@ -5291,7 +5291,7 @@
             </a:pPr>
             <a:r>
               <a:rPr/>
-              <a:t>With 8,000 drives a single split is fairly stable, and lesson 4’s numbers were trustworthy. Eight hundred records with 29 positives is a far more common situation than eight thousand — it is what a real pilot study looks like — and what follows is simply what the honest version of that situation looks like.</a:t>
+              <a:t>With 8,000 drives a single split is fairly stable, and lesson 4’s numbers were trustworthy. Eight hundred records with 29 positives is a far more common situation than eight thousand - it is what a real pilot study looks like - and what follows is simply what the honest version of that situation looks like.</a:t>
             </a:r>
           </a:p>
           <a:p>
@@ -5415,7 +5415,7 @@
             </a:pPr>
             <a:r>
               <a:rPr/>
-              <a:t>Sit on the 1.000 for a moment. That split reports a PERFECT classifier — every failing drive ranked above every healthy one — for a model whose honest performance is about 0.95. Ten of the two hundred scored above 0.99.</a:t>
+              <a:t>Sit on the 1.000 for a moment. That split reports a PERFECT classifier - every failing drive ranked above every healthy one - for a model whose honest performance is about 0.95. Ten of the two hundred scored above 0.99.</a:t>
             </a:r>
           </a:p>
           <a:p>
@@ -5635,7 +5635,7 @@
             </a:pPr>
             <a:r>
               <a:rPr/>
-              <a:t>Reporting a noisy number is bad. Choosing with one is worse, because noise does not average out when it is used to decide — it decides.</a:t>
+              <a:t>Reporting a noisy number is bad. Choosing with one is worse, because noise does not average out when it is used to decide - it decides.</a:t>
             </a:r>
           </a:p>
           <a:p>
@@ -5787,7 +5787,7 @@
             </a:pPr>
             <a:r>
               <a:rPr/>
-              <a:t>If anyone asks why C=0.01 won more often than the others — it is not evidence of anything. Run the whole thing with different seeds and the ordering moves. That is exactly the point.</a:t>
+              <a:t>If anyone asks why C=0.01 won more often than the others - it is not evidence of anything. Run the whole thing with different seeds and the ordering moves. That is exactly the point.</a:t>
             </a:r>
           </a:p>
         </p:txBody>
@@ -8860,7 +8860,7 @@
             </a:pPr>
             <a:r>
               <a:rPr/>
-              <a:t>Lesson 5 — Experimental Methodology</a:t>
+              <a:t>Lesson 5: Experimental Methodology</a:t>
             </a:r>
           </a:p>
         </p:txBody>
@@ -8896,7 +8896,7 @@
             <a:br/>
             <a:r>
               <a:rPr/>
-              <a:t>Fabio Antonini — Università degli Studi dell’Aquila</a:t>
+              <a:t>Fabio Antonini, Università degli Studi dell’Aquila</a:t>
             </a:r>
           </a:p>
         </p:txBody>
@@ -9245,7 +9245,7 @@
             </a:pPr>
             <a:r>
               <a:rPr/>
-              <a:t>Report the spread — but not as a confidence interval</a:t>
+              <a:t>Report the spread, but not as a confidence interval</a:t>
             </a:r>
           </a:p>
         </p:txBody>
@@ -10386,7 +10386,7 @@
             <a:pPr lvl="0"/>
             <a:r>
               <a:rPr/>
-              <a:t>The threshold you chose — and how you chose it</a:t>
+              <a:t>The threshold you chose, and how you chose it</a:t>
             </a:r>
           </a:p>
         </p:txBody>
@@ -10550,7 +10550,7 @@
             </a:r>
             <a:r>
               <a:rPr/>
-              <a:t> — the average model is wrong</a:t>
+              <a:t>: the average model is wrong</a:t>
             </a:r>
           </a:p>
           <a:p>
@@ -10561,7 +10561,7 @@
             </a:r>
             <a:r>
               <a:rPr/>
-              <a:t> — the individual models disagree</a:t>
+              <a:t>: the individual models disagree</a:t>
             </a:r>
           </a:p>
           <a:p>
@@ -10572,7 +10572,7 @@
             </a:r>
             <a:r>
               <a:rPr/>
-              <a:t> — the target itself is uncertain</a:t>
+              <a:t>: the target itself is uncertain</a:t>
             </a:r>
           </a:p>
         </p:txBody>
@@ -12442,7 +12442,7 @@
             </a:pPr>
             <a:r>
               <a:rPr/>
-              <a:t>Fix it — and look what happens</a:t>
+              <a:t>Fix it, and look what happens</a:t>
             </a:r>
           </a:p>
         </p:txBody>
@@ -13300,7 +13300,7 @@
             <a:pPr lvl="0"/>
             <a:r>
               <a:rPr/>
-              <a:t>One split is a lottery — and how wide the lottery is</a:t>
+              <a:t>One split is a lottery, and how wide the lottery is</a:t>
             </a:r>
           </a:p>
           <a:p>
@@ -13412,7 +13412,7 @@
             </a:r>
             <a:r>
               <a:rPr/>
-              <a:t> — fit the parameters</a:t>
+              <a:t>: fit the parameters</a:t>
             </a:r>
           </a:p>
           <a:p>
@@ -13423,7 +13423,7 @@
             </a:r>
             <a:r>
               <a:rPr/>
-              <a:t> — make every choice: model, hyperparameters, threshold</a:t>
+              <a:t>: make every choice: model, hyperparameters, threshold</a:t>
             </a:r>
           </a:p>
           <a:p>
@@ -13434,7 +13434,7 @@
             </a:r>
             <a:r>
               <a:rPr/>
-              <a:t> — report. Touched </a:t>
+              <a:t>: report. Touched </a:t>
             </a:r>
             <a:r>
               <a:rPr b="1"/>
@@ -13650,7 +13650,7 @@
             </a:r>
             <a:r>
               <a:rPr/>
-              <a:t> — defaults change between releases</a:t>
+              <a:t>: defaults change between releases</a:t>
             </a:r>
           </a:p>
           <a:p>
@@ -13983,7 +13983,7 @@
             </a:r>
             <a:r>
               <a:rPr/>
-              <a:t> — more data will not help</a:t>
+              <a:t>: more data will not help</a:t>
             </a:r>
           </a:p>
           <a:p>
@@ -14282,7 +14282,7 @@
             <a:pPr lvl="0"/>
             <a:r>
               <a:rPr/>
-              <a:t>Not to exaggerate — 800 rows with 29 positives is the ordinary case</a:t>
+              <a:t>Not to exaggerate: 800 rows with 29 positives is the ordinary case</a:t>
             </a:r>
           </a:p>
         </p:txBody>
@@ -14455,7 +14455,7 @@
             <a:pPr lvl="0"/>
             <a:r>
               <a:rPr/>
-              <a:t>Every AUC — area under the receiver operating characteristic curve — rests on seven</a:t>
+              <a:t>Every AUC (area under the receiver operating characteristic curve) rests on seven</a:t>
             </a:r>
           </a:p>
         </p:txBody>

--- a/Lessons/05_experimental_methodology/Slides/experimental_methodology_slides.pptx
+++ b/Lessons/05_experimental_methodology/Slides/experimental_methodology_slides.pptx
@@ -12911,8 +12911,8 @@
         </p:blipFill>
         <p:spPr bwMode="auto">
           <a:xfrm>
-            <a:off x="853148" y="1166099"/>
-            <a:ext cx="7437704" cy="3360181"/>
+            <a:off x="827978" y="1166099"/>
+            <a:ext cx="7488043" cy="3360181"/>
           </a:xfrm>
           <a:prstGeom prst="rect">
             <a:avLst/>

--- a/Lessons/05_experimental_methodology/Slides/experimental_methodology_slides.pptx
+++ b/Lessons/05_experimental_methodology/Slides/experimental_methodology_slides.pptx
@@ -2317,7 +2317,7 @@
             </a:pPr>
             <a:r>
               <a:rPr/>
-              <a:t>Noise is 484 in every row and is left out of the table for width - say so.</a:t>
+              <a:t>Noise is 484 in every row - point at the column and say that it never moves, because it is a property of the data and not of the model.</a:t>
             </a:r>
           </a:p>
           <a:p>
@@ -10814,10 +10814,11 @@
                 <a:tableStyleId>{5C22544A-7EE6-4342-B048-85BDC9FD1C3A}</a:tableStyleId>
               </a:tblPr>
               <a:tblGrid>
-                <a:gridCol w="2057400"/>
-                <a:gridCol w="2057400"/>
-                <a:gridCol w="2057400"/>
-                <a:gridCol w="2057400"/>
+                <a:gridCol w="1638300"/>
+                <a:gridCol w="1638300"/>
+                <a:gridCol w="1638300"/>
+                <a:gridCol w="1638300"/>
+                <a:gridCol w="1638300"/>
               </a:tblGrid>
               <a:tr h="0">
                 <a:tc>
@@ -10863,6 +10864,22 @@
                       <a:r>
                         <a:rPr/>
                         <a:t>Variance</a:t>
+                      </a:r>
+                    </a:p>
+                  </a:txBody>
+                  <a:tcPr/>
+                </a:tc>
+                <a:tc>
+                  <a:txBody>
+                    <a:bodyPr/>
+                    <a:lstStyle/>
+                    <a:p>
+                      <a:pPr lvl="0" indent="0" marL="0">
+                        <a:buNone/>
+                      </a:pPr>
+                      <a:r>
+                        <a:rPr/>
+                        <a:t>Noise</a:t>
                       </a:r>
                     </a:p>
                   </a:txBody>
@@ -10941,6 +10958,21 @@
                       </a:pPr>
                       <a:r>
                         <a:rPr/>
+                        <a:t>484.0</a:t>
+                      </a:r>
+                    </a:p>
+                  </a:txBody>
+                </a:tc>
+                <a:tc>
+                  <a:txBody>
+                    <a:bodyPr/>
+                    <a:lstStyle/>
+                    <a:p>
+                      <a:pPr lvl="0" indent="0" marL="0">
+                        <a:buNone/>
+                      </a:pPr>
+                      <a:r>
+                        <a:rPr/>
                         <a:t>6,458.6</a:t>
                       </a:r>
                     </a:p>
@@ -10989,6 +11021,21 @@
                       <a:r>
                         <a:rPr/>
                         <a:t>70.8</a:t>
+                      </a:r>
+                    </a:p>
+                  </a:txBody>
+                </a:tc>
+                <a:tc>
+                  <a:txBody>
+                    <a:bodyPr/>
+                    <a:lstStyle/>
+                    <a:p>
+                      <a:pPr lvl="0" indent="0" marL="0">
+                        <a:buNone/>
+                      </a:pPr>
+                      <a:r>
+                        <a:rPr/>
+                        <a:t>484.0</a:t>
                       </a:r>
                     </a:p>
                   </a:txBody>
@@ -11065,6 +11112,21 @@
                       </a:pPr>
                       <a:r>
                         <a:rPr/>
+                        <a:t>484.0</a:t>
+                      </a:r>
+                    </a:p>
+                  </a:txBody>
+                </a:tc>
+                <a:tc>
+                  <a:txBody>
+                    <a:bodyPr/>
+                    <a:lstStyle/>
+                    <a:p>
+                      <a:pPr lvl="0" indent="0" marL="0">
+                        <a:buNone/>
+                      </a:pPr>
+                      <a:r>
+                        <a:rPr/>
                         <a:t>861.8</a:t>
                       </a:r>
                     </a:p>
@@ -11127,6 +11189,21 @@
                       </a:pPr>
                       <a:r>
                         <a:rPr/>
+                        <a:t>484.0</a:t>
+                      </a:r>
+                    </a:p>
+                  </a:txBody>
+                </a:tc>
+                <a:tc>
+                  <a:txBody>
+                    <a:bodyPr/>
+                    <a:lstStyle/>
+                    <a:p>
+                      <a:pPr lvl="0" indent="0" marL="0">
+                        <a:buNone/>
+                      </a:pPr>
+                      <a:r>
+                        <a:rPr/>
                         <a:t>32,328,366.2</a:t>
                       </a:r>
                     </a:p>
@@ -11427,7 +11504,7 @@
                       </a:pPr>
                       <a:r>
                         <a:rPr/>
-                        <a:t>n = 25</a:t>
+                        <a:t>m = 25</a:t>
                       </a:r>
                     </a:p>
                   </a:txBody>
@@ -11443,7 +11520,7 @@
                       </a:pPr>
                       <a:r>
                         <a:rPr/>
-                        <a:t>n = 60</a:t>
+                        <a:t>m = 60</a:t>
                       </a:r>
                     </a:p>
                   </a:txBody>
@@ -11459,7 +11536,7 @@
                       </a:pPr>
                       <a:r>
                         <a:rPr/>
-                        <a:t>n = 150</a:t>
+                        <a:t>m = 150</a:t>
                       </a:r>
                     </a:p>
                   </a:txBody>

--- a/Lessons/05_experimental_methodology/Slides/experimental_methodology_slides.pptx
+++ b/Lessons/05_experimental_methodology/Slides/experimental_methodology_slides.pptx
@@ -5153,7 +5153,7 @@
             </a:pPr>
             <a:r>
               <a:rPr/>
-              <a:t>Set it explicitly and say the deadline out loud: next Friday, 30 October.</a:t>
+              <a:t>Set it explicitly and say the deadline out loud: next Friday, 30 October, 09:00, before lesson 6 starts.</a:t>
             </a:r>
           </a:p>
           <a:p>
@@ -14151,7 +14151,11 @@
             </a:r>
             <a:r>
               <a:rPr/>
-              <a:t>, due Friday 30 October</a:t>
+              <a:t>, due </a:t>
+            </a:r>
+            <a:r>
+              <a:rPr b="1"/>
+              <a:t>Friday 30 October 2026, 09:00</a:t>
             </a:r>
           </a:p>
           <a:p>

--- a/Lessons/05_experimental_methodology/Slides/experimental_methodology_slides.pptx
+++ b/Lessons/05_experimental_methodology/Slides/experimental_methodology_slides.pptx
@@ -569,7 +569,7 @@
             </a:pPr>
             <a:r>
               <a:rPr/>
-              <a:t>Collect exercise 4. The paragraph defending the threshold was the part that carried the marks, so say one sentence about what you saw across the class.</a:t>
+              <a:t>Nothing to collect. The defence of the threshold is the part that matters, so ask two people to give theirs out loud - that is the rehearsal for the exam, where one of the ten exercises is drawn and discussed.</a:t>
             </a:r>
           </a:p>
           <a:p>
@@ -5153,7 +5153,7 @@
             </a:pPr>
             <a:r>
               <a:rPr/>
-              <a:t>Set it explicitly and say the deadline out loud: next Friday, 30 October, 09:00, before lesson 6 starts.</a:t>
+              <a:t>Set it explicitly and say out loud when it comes back: the first ten minutes of next Friday, 30 October.</a:t>
             </a:r>
           </a:p>
           <a:p>
@@ -10379,7 +10379,7 @@
             <a:pPr lvl="0"/>
             <a:r>
               <a:rPr/>
-              <a:t>Exercise 4 was due today</a:t>
+              <a:t>Exercise 4, which we discuss now</a:t>
             </a:r>
           </a:p>
           <a:p>
@@ -14151,11 +14151,11 @@
             </a:r>
             <a:r>
               <a:rPr/>
-              <a:t>, due </a:t>
+              <a:t>, discussed at the start of </a:t>
             </a:r>
             <a:r>
               <a:rPr b="1"/>
-              <a:t>Friday 30 October 2026, 09:00</a:t>
+              <a:t>Friday 30 October</a:t>
             </a:r>
           </a:p>
           <a:p>

--- a/Lessons/05_experimental_methodology/Slides/experimental_methodology_slides.pptx
+++ b/Lessons/05_experimental_methodology/Slides/experimental_methodology_slides.pptx
@@ -9356,7 +9356,7 @@
           </p:nvPr>
         </p:nvGraphicFramePr>
         <p:xfrm>
-          <a:off x="457200" y="1193800"/>
+          <a:off x="457200" y="1166099"/>
           <a:ext cx="8229600" cy="3390900"/>
         </p:xfrm>
         <a:graphic>
@@ -9722,7 +9722,7 @@
           </p:nvPr>
         </p:nvGraphicFramePr>
         <p:xfrm>
-          <a:off x="457200" y="1193800"/>
+          <a:off x="457200" y="1166099"/>
           <a:ext cx="8229600" cy="3390900"/>
         </p:xfrm>
         <a:graphic>
@@ -10727,8 +10727,8 @@
         </p:blipFill>
         <p:spPr bwMode="auto">
           <a:xfrm>
-            <a:off x="457200" y="2433439"/>
-            <a:ext cx="8229600" cy="825500"/>
+            <a:off x="457200" y="2471539"/>
+            <a:ext cx="8229599" cy="749300"/>
           </a:xfrm>
           <a:prstGeom prst="rect">
             <a:avLst/>
@@ -10804,7 +10804,7 @@
           </p:nvPr>
         </p:nvGraphicFramePr>
         <p:xfrm>
-          <a:off x="457200" y="1193800"/>
+          <a:off x="457200" y="1166099"/>
           <a:ext cx="8229600" cy="3390900"/>
         </p:xfrm>
         <a:graphic>
@@ -10814,11 +10814,11 @@
                 <a:tableStyleId>{5C22544A-7EE6-4342-B048-85BDC9FD1C3A}</a:tableStyleId>
               </a:tblPr>
               <a:tblGrid>
-                <a:gridCol w="1638300"/>
-                <a:gridCol w="1638300"/>
-                <a:gridCol w="1638300"/>
-                <a:gridCol w="1638300"/>
-                <a:gridCol w="1638300"/>
+                <a:gridCol w="1645920"/>
+                <a:gridCol w="1645920"/>
+                <a:gridCol w="1645920"/>
+                <a:gridCol w="1645920"/>
+                <a:gridCol w="1645920"/>
               </a:tblGrid>
               <a:tr h="0">
                 <a:tc>
@@ -11462,7 +11462,7 @@
           </p:nvPr>
         </p:nvGraphicFramePr>
         <p:xfrm>
-          <a:off x="457200" y="1193800"/>
+          <a:off x="457200" y="1166099"/>
           <a:ext cx="8229600" cy="3390900"/>
         </p:xfrm>
         <a:graphic>
@@ -12747,7 +12747,7 @@
           </p:nvPr>
         </p:nvGraphicFramePr>
         <p:xfrm>
-          <a:off x="457200" y="1193800"/>
+          <a:off x="457200" y="1166099"/>
           <a:ext cx="8229600" cy="3390900"/>
         </p:xfrm>
         <a:graphic>
@@ -13147,7 +13147,7 @@
           </p:nvPr>
         </p:nvGraphicFramePr>
         <p:xfrm>
-          <a:off x="457200" y="1193800"/>
+          <a:off x="457200" y="1166099"/>
           <a:ext cx="8229600" cy="3390900"/>
         </p:xfrm>
         <a:graphic>
@@ -14604,7 +14604,7 @@
           </p:nvPr>
         </p:nvGraphicFramePr>
         <p:xfrm>
-          <a:off x="457200" y="1193800"/>
+          <a:off x="457200" y="1166099"/>
           <a:ext cx="8229600" cy="3390900"/>
         </p:xfrm>
         <a:graphic>

--- a/Lessons/05_experimental_methodology/Slides/experimental_methodology_slides.pptx
+++ b/Lessons/05_experimental_methodology/Slides/experimental_methodology_slides.pptx
@@ -12289,7 +12289,7 @@
               <a:rPr>
                 <a:latin typeface="Courier"/>
               </a:rPr>
-              <a:t>selector </a:t>
+              <a:t>sel </a:t>
             </a:r>
             <a:r>
               <a:rPr>
@@ -12304,7 +12304,36 @@
               <a:rPr>
                 <a:latin typeface="Courier"/>
               </a:rPr>
-              <a:t> SelectKBest(f_classif, k</a:t>
+              <a:t> SelectKBest(f_classif, </a:t>
+            </a:r>
+            <a:r>
+              <a:rPr>
+                <a:solidFill>
+                  <a:srgbClr val="40A070"/>
+                </a:solidFill>
+                <a:latin typeface="Courier"/>
+              </a:rPr>
+              <a:t>10</a:t>
+            </a:r>
+            <a:r>
+              <a:rPr>
+                <a:latin typeface="Courier"/>
+              </a:rPr>
+              <a:t>)</a:t>
+            </a:r>
+            <a:br/>
+            <a:r>
+              <a:rPr>
+                <a:latin typeface="Courier"/>
+              </a:rPr>
+              <a:t>sel.fit(noise, y)</a:t>
+            </a:r>
+            <a:br/>
+            <a:r>
+              <a:rPr>
+                <a:latin typeface="Courier"/>
+              </a:rPr>
+              <a:t>X </a:t>
             </a:r>
             <a:r>
               <a:rPr>
@@ -12317,25 +12346,16 @@
             </a:r>
             <a:r>
               <a:rPr>
-                <a:solidFill>
-                  <a:srgbClr val="40A070"/>
-                </a:solidFill>
                 <a:latin typeface="Courier"/>
               </a:rPr>
-              <a:t>10</a:t>
-            </a:r>
+              <a:t> noise.loc[:, sel.get_support()]</a:t>
+            </a:r>
+            <a:br/>
             <a:r>
               <a:rPr>
                 <a:latin typeface="Courier"/>
               </a:rPr>
-              <a:t>).fit(noise, y)</a:t>
-            </a:r>
-            <a:br/>
-            <a:r>
-              <a:rPr>
-                <a:latin typeface="Courier"/>
-              </a:rPr>
-              <a:t>chosen </a:t>
+              <a:t>cross_val_score(model, X, y, cv</a:t>
             </a:r>
             <a:r>
               <a:rPr>
@@ -12350,29 +12370,7 @@
               <a:rPr>
                 <a:latin typeface="Courier"/>
               </a:rPr>
-              <a:t> noise.loc[:, selector.get_support()]</a:t>
-            </a:r>
-            <a:br/>
-            <a:r>
-              <a:rPr>
-                <a:latin typeface="Courier"/>
-              </a:rPr>
-              <a:t>cross_val_score(model, chosen, y, cv</a:t>
-            </a:r>
-            <a:r>
-              <a:rPr>
-                <a:solidFill>
-                  <a:srgbClr val="666666"/>
-                </a:solidFill>
-                <a:latin typeface="Courier"/>
-              </a:rPr>
-              <a:t>=</a:t>
-            </a:r>
-            <a:r>
-              <a:rPr>
-                <a:latin typeface="Courier"/>
-              </a:rPr>
-              <a:t>folds)</a:t>
+              <a:t>cv)</a:t>
             </a:r>
           </a:p>
         </p:txBody>
@@ -12910,7 +12908,7 @@
                       </a:pPr>
                       <a:r>
                         <a:rPr/>
-                        <a:t>0.500</a:t>
+                        <a:t>0.5000</a:t>
                       </a:r>
                     </a:p>
                   </a:txBody>
